--- a/word-drafts/figures/AAS-Fig12-RegistryStores.pptx
+++ b/word-drafts/figures/AAS-Fig12-RegistryStores.pptx
@@ -3981,7 +3981,7 @@
         <p:spPr>
           <a:xfrm>
             <a:off x="4595812" y="1228725"/>
-            <a:ext cx="485775" cy="123825"/>
+            <a:ext cx="609600" cy="123825"/>
           </a:xfrm>
           <a:prstGeom prst="rect">
             <a:avLst/>
@@ -4053,7 +4053,7 @@
         <p:spPr>
           <a:xfrm>
             <a:off x="5881687" y="1228725"/>
-            <a:ext cx="485775" cy="123825"/>
+            <a:ext cx="609600" cy="123825"/>
           </a:xfrm>
           <a:prstGeom prst="rect">
             <a:avLst/>
@@ -4125,7 +4125,7 @@
         <p:spPr>
           <a:xfrm>
             <a:off x="7167562" y="1228725"/>
-            <a:ext cx="485775" cy="123825"/>
+            <a:ext cx="609600" cy="123825"/>
           </a:xfrm>
           <a:prstGeom prst="rect">
             <a:avLst/>
@@ -4197,7 +4197,7 @@
         <p:spPr>
           <a:xfrm>
             <a:off x="9739312" y="1228725"/>
-            <a:ext cx="485775" cy="123825"/>
+            <a:ext cx="609600" cy="123825"/>
           </a:xfrm>
           <a:prstGeom prst="rect">
             <a:avLst/>
@@ -4269,7 +4269,7 @@
         <p:spPr>
           <a:xfrm>
             <a:off x="11025187" y="1228725"/>
-            <a:ext cx="485775" cy="123825"/>
+            <a:ext cx="609600" cy="123825"/>
           </a:xfrm>
           <a:prstGeom prst="rect">
             <a:avLst/>
@@ -4341,7 +4341,7 @@
         <p:spPr>
           <a:xfrm>
             <a:off x="2024062" y="2314575"/>
-            <a:ext cx="495300" cy="123825"/>
+            <a:ext cx="619125" cy="123825"/>
           </a:xfrm>
           <a:prstGeom prst="rect">
             <a:avLst/>
@@ -4413,7 +4413,7 @@
         <p:spPr>
           <a:xfrm>
             <a:off x="4595812" y="2314575"/>
-            <a:ext cx="495300" cy="123825"/>
+            <a:ext cx="619125" cy="123825"/>
           </a:xfrm>
           <a:prstGeom prst="rect">
             <a:avLst/>
@@ -4485,7 +4485,7 @@
         <p:spPr>
           <a:xfrm>
             <a:off x="7167562" y="2314575"/>
-            <a:ext cx="495300" cy="123825"/>
+            <a:ext cx="619125" cy="123825"/>
           </a:xfrm>
           <a:prstGeom prst="rect">
             <a:avLst/>
@@ -4557,7 +4557,7 @@
         <p:spPr>
           <a:xfrm>
             <a:off x="9739312" y="2314575"/>
-            <a:ext cx="495300" cy="123825"/>
+            <a:ext cx="619125" cy="123825"/>
           </a:xfrm>
           <a:prstGeom prst="rect">
             <a:avLst/>
@@ -4629,7 +4629,7 @@
         <p:spPr>
           <a:xfrm>
             <a:off x="12311062" y="2314575"/>
-            <a:ext cx="495300" cy="123825"/>
+            <a:ext cx="619125" cy="123825"/>
           </a:xfrm>
           <a:prstGeom prst="rect">
             <a:avLst/>
@@ -4701,7 +4701,7 @@
         <p:spPr>
           <a:xfrm>
             <a:off x="13596937" y="2314575"/>
-            <a:ext cx="495300" cy="123825"/>
+            <a:ext cx="619125" cy="123825"/>
           </a:xfrm>
           <a:prstGeom prst="rect">
             <a:avLst/>
@@ -4773,7 +4773,7 @@
         <p:spPr>
           <a:xfrm>
             <a:off x="9739312" y="3286125"/>
-            <a:ext cx="495300" cy="123825"/>
+            <a:ext cx="619125" cy="123825"/>
           </a:xfrm>
           <a:prstGeom prst="rect">
             <a:avLst/>
@@ -4845,7 +4845,7 @@
         <p:spPr>
           <a:xfrm>
             <a:off x="11025187" y="3286125"/>
-            <a:ext cx="495300" cy="123825"/>
+            <a:ext cx="619125" cy="123825"/>
           </a:xfrm>
           <a:prstGeom prst="rect">
             <a:avLst/>
